--- a/docs/posupos-sales/posupos-shiryo.pptx
+++ b/docs/posupos-sales/posupos-shiryo.pptx
@@ -13480,7 +13480,7 @@
                 <a:ea typeface="Yu Gothic" pitchFamily="34" charset="-122"/>
                 <a:cs typeface="Yu Gothic" pitchFamily="34" charset="-120"/>
               </a:rPr>
-              <a:t>応募者にURLを送るだけで、AIの面接官が一次面接。雰囲気のまとめ・写真・録画・会話がお店に届きます。</a:t>
+              <a:t>URLを送るだけ。応募者は条件をボタンで選んで、AIの面接官と1分ほど話します。録画と答えがお店に届きます。</a:t>
             </a:r>
             <a:endParaRPr lang="en-US" sz="1400" dirty="0"/>
           </a:p>
@@ -13672,7 +13672,7 @@
                 <a:ea typeface="Yu Gothic" pitchFamily="34" charset="-122"/>
                 <a:cs typeface="Yu Gothic" pitchFamily="34" charset="-120"/>
               </a:rPr>
-              <a:t>AI面接：URLを送るだけで、AIが一次面接</a:t>
+              <a:t>AI面接：ボタンで選んで、1分話す</a:t>
             </a:r>
             <a:endParaRPr lang="en-US" sz="3000" dirty="0"/>
           </a:p>
@@ -13686,12 +13686,12 @@
         </p:nvSpPr>
         <p:spPr>
           <a:xfrm>
-            <a:off x="539496" y="1453896"/>
-            <a:ext cx="5230368" cy="4315968"/>
+            <a:off x="630936" y="1453896"/>
+            <a:ext cx="2624328" cy="3950208"/>
           </a:xfrm>
           <a:prstGeom prst="roundRect">
             <a:avLst>
-              <a:gd name="adj" fmla="val 2119"/>
+              <a:gd name="adj" fmla="val 3484"/>
             </a:avLst>
           </a:prstGeom>
           <a:solidFill>
@@ -13714,7 +13714,7 @@
       </p:sp>
       <p:pic>
         <p:nvPicPr>
-          <p:cNvPr id="4" name="Image 0" descr="/tmp/claude-0/-home-user-GACHICAREERAI/b3a26714-2895-56f0-b4c8-705422406677/scratchpad/deck/pos-ai-interview-day.png">    </p:cNvPr>
+          <p:cNvPr id="4" name="Image 0" descr="/tmp/claude-0/-home-user-GACHICAREERAI/b3a26714-2895-56f0-b4c8-705422406677/scratchpad/deck/pos-ai-choose.png">    </p:cNvPr>
           <p:cNvPicPr>
             <a:picLocks noChangeAspect="1"/>
           </p:cNvPicPr>
@@ -13728,8 +13728,8 @@
         </p:blipFill>
         <p:spPr>
           <a:xfrm>
-            <a:off x="594360" y="1508760"/>
-            <a:ext cx="5120640" cy="4206240"/>
+            <a:off x="685800" y="1508760"/>
+            <a:ext cx="2514600" cy="3840480"/>
           </a:xfrm>
           <a:prstGeom prst="rect">
             <a:avLst/>
@@ -13739,6 +13739,64 @@
       <p:sp>
         <p:nvSpPr>
           <p:cNvPr id="5" name="Shape 2"/>
+          <p:cNvSpPr/>
+          <p:nvPr/>
+        </p:nvSpPr>
+        <p:spPr>
+          <a:xfrm>
+            <a:off x="3374136" y="1453896"/>
+            <a:ext cx="2505456" cy="3950208"/>
+          </a:xfrm>
+          <a:prstGeom prst="roundRect">
+            <a:avLst>
+              <a:gd name="adj" fmla="val 3650"/>
+            </a:avLst>
+          </a:prstGeom>
+          <a:solidFill>
+            <a:srgbClr val="FFFFFF"/>
+          </a:solidFill>
+          <a:ln w="12700">
+            <a:solidFill>
+              <a:srgbClr val="DCE4F2"/>
+            </a:solidFill>
+            <a:prstDash val="solid"/>
+          </a:ln>
+          <a:effectLst>
+            <a:outerShdw sx="100000" sy="100000" kx="0" ky="0" algn="bl" rotWithShape="0" blurRad="127000" dist="50800" dir="5400000">
+              <a:srgbClr val="13234A">
+                <a:alpha val="15000"/>
+              </a:srgbClr>
+            </a:outerShdw>
+          </a:effectLst>
+        </p:spPr>
+      </p:sp>
+      <p:pic>
+        <p:nvPicPr>
+          <p:cNvPr id="6" name="Image 1" descr="/tmp/claude-0/-home-user-GACHICAREERAI/b3a26714-2895-56f0-b4c8-705422406677/scratchpad/deck/pos-ai-talk-day.png">    </p:cNvPr>
+          <p:cNvPicPr>
+            <a:picLocks noChangeAspect="1"/>
+          </p:cNvPicPr>
+          <p:nvPr/>
+        </p:nvPicPr>
+        <p:blipFill>
+          <a:blip r:embed="rId2"/>
+          <a:stretch>
+            <a:fillRect/>
+          </a:stretch>
+        </p:blipFill>
+        <p:spPr>
+          <a:xfrm>
+            <a:off x="3429000" y="1508760"/>
+            <a:ext cx="2395728" cy="3840480"/>
+          </a:xfrm>
+          <a:prstGeom prst="rect">
+            <a:avLst/>
+          </a:prstGeom>
+        </p:spPr>
+      </p:pic>
+      <p:sp>
+        <p:nvSpPr>
+          <p:cNvPr id="7" name="Shape 3"/>
           <p:cNvSpPr/>
           <p:nvPr/>
         </p:nvSpPr>
@@ -13765,7 +13823,7 @@
       </p:sp>
       <p:sp>
         <p:nvSpPr>
-          <p:cNvPr id="6" name="Text 3"/>
+          <p:cNvPr id="8" name="Text 4"/>
           <p:cNvSpPr txBox="1"/>
           <p:nvPr/>
         </p:nvSpPr>
@@ -13804,7 +13862,7 @@
       </p:sp>
       <p:sp>
         <p:nvSpPr>
-          <p:cNvPr id="7" name="Text 4"/>
+          <p:cNvPr id="9" name="Text 5"/>
           <p:cNvSpPr txBox="1"/>
           <p:nvPr/>
         </p:nvSpPr>
@@ -13846,7 +13904,7 @@
       </p:sp>
       <p:sp>
         <p:nvSpPr>
-          <p:cNvPr id="8" name="Shape 5"/>
+          <p:cNvPr id="10" name="Shape 6"/>
           <p:cNvSpPr/>
           <p:nvPr/>
         </p:nvSpPr>
@@ -13873,7 +13931,7 @@
       </p:sp>
       <p:sp>
         <p:nvSpPr>
-          <p:cNvPr id="9" name="Text 6"/>
+          <p:cNvPr id="11" name="Text 7"/>
           <p:cNvSpPr txBox="1"/>
           <p:nvPr/>
         </p:nvSpPr>
@@ -13904,7 +13962,7 @@
                 <a:ea typeface="Yu Gothic" pitchFamily="34" charset="-122"/>
                 <a:cs typeface="Yu Gothic" pitchFamily="34" charset="-120"/>
               </a:rPr>
-              <a:t>職種に合わせて質問</a:t>
+              <a:t>条件はボタンで選ぶ</a:t>
             </a:r>
             <a:endParaRPr lang="en-US" sz="1700" dirty="0"/>
           </a:p>
@@ -13912,7 +13970,7 @@
       </p:sp>
       <p:sp>
         <p:nvSpPr>
-          <p:cNvPr id="10" name="Text 7"/>
+          <p:cNvPr id="12" name="Text 8"/>
           <p:cNvSpPr txBox="1"/>
           <p:nvPr/>
         </p:nvSpPr>
@@ -13946,7 +14004,7 @@
                 <a:ea typeface="Yu Gothic" pitchFamily="34" charset="-122"/>
                 <a:cs typeface="Yu Gothic" pitchFamily="34" charset="-120"/>
               </a:rPr>
-              <a:t>ホール・キッチン、キャスト・黒服など職種ごとの質問に加えて、お店の質問も10個まで。</a:t>
+              <a:t>出勤日数・曜日・時間帯・勤務開始・通勤・経験。夜のお店はお酒・年齢の確認も（1分ほど）。</a:t>
             </a:r>
             <a:endParaRPr lang="en-US" sz="1350" dirty="0"/>
           </a:p>
@@ -13954,7 +14012,7 @@
       </p:sp>
       <p:sp>
         <p:nvSpPr>
-          <p:cNvPr id="11" name="Shape 8"/>
+          <p:cNvPr id="13" name="Shape 9"/>
           <p:cNvSpPr/>
           <p:nvPr/>
         </p:nvSpPr>
@@ -13981,7 +14039,7 @@
       </p:sp>
       <p:sp>
         <p:nvSpPr>
-          <p:cNvPr id="12" name="Text 9"/>
+          <p:cNvPr id="14" name="Text 10"/>
           <p:cNvSpPr txBox="1"/>
           <p:nvPr/>
         </p:nvSpPr>
@@ -14012,7 +14070,7 @@
                 <a:ea typeface="Yu Gothic" pitchFamily="34" charset="-122"/>
                 <a:cs typeface="Yu Gothic" pitchFamily="34" charset="-120"/>
               </a:rPr>
-              <a:t>会う前にわかる</a:t>
+              <a:t>AIと1分ほど話す</a:t>
             </a:r>
             <a:endParaRPr lang="en-US" sz="1700" dirty="0"/>
           </a:p>
@@ -14020,7 +14078,7 @@
       </p:sp>
       <p:sp>
         <p:nvSpPr>
-          <p:cNvPr id="13" name="Text 10"/>
+          <p:cNvPr id="15" name="Text 11"/>
           <p:cNvSpPr txBox="1"/>
           <p:nvPr/>
         </p:nvSpPr>
@@ -14054,7 +14112,7 @@
                 <a:ea typeface="Yu Gothic" pitchFamily="34" charset="-122"/>
                 <a:cs typeface="Yu Gothic" pitchFamily="34" charset="-120"/>
               </a:rPr>
-              <a:t>雰囲気のまとめ・入れる日と時間・気になった点・写真・はじめの1分の録画・会話の全部。</a:t>
+              <a:t>自己紹介・やってみたい理由・お店からの質問（3つまで）。話している姿を録画します。</a:t>
             </a:r>
             <a:endParaRPr lang="en-US" sz="1350" dirty="0"/>
           </a:p>
@@ -14062,7 +14120,7 @@
       </p:sp>
       <p:sp>
         <p:nvSpPr>
-          <p:cNvPr id="14" name="Text 11"/>
+          <p:cNvPr id="16" name="Text 12"/>
           <p:cNvSpPr txBox="1"/>
           <p:nvPr/>
         </p:nvSpPr>
@@ -14093,7 +14151,7 @@
                 <a:ea typeface="Yu Gothic" pitchFamily="34" charset="-122"/>
                 <a:cs typeface="Yu Gothic" pitchFamily="34" charset="-120"/>
               </a:rPr>
-              <a:t>画面は見本です（お店・応募者は架空）。応募者がAIと話す時間は10〜15分。</a:t>
+              <a:t>画面は見本です（お店・応募者は架空）。届くもの：録画・顔の写真3枚・選んだ答えの一覧・話し方の雰囲気のまとめ・会話の文字。</a:t>
             </a:r>
             <a:endParaRPr lang="en-US" sz="1000" dirty="0"/>
           </a:p>
@@ -14300,7 +14358,7 @@
                 <a:ea typeface="Yu Gothic" pitchFamily="34" charset="-122"/>
                 <a:cs typeface="Yu Gothic" pitchFamily="34" charset="-120"/>
               </a:rPr>
-              <a:t>お店の面接</a:t>
+              <a:t>お店が見るのは</a:t>
             </a:r>
             <a:endParaRPr lang="en-US" sz="1200" dirty="0"/>
           </a:p>
@@ -14331,7 +14389,7 @@
               <a:buNone/>
             </a:pPr>
             <a:r>
-              <a:rPr lang="en-US" sz="2000" b="1" dirty="0">
+              <a:rPr lang="en-US" sz="2400" b="1" dirty="0">
                 <a:solidFill>
                   <a:srgbClr val="FFE58A"/>
                 </a:solidFill>
@@ -14339,9 +14397,9 @@
                 <a:ea typeface="Yu Gothic" pitchFamily="34" charset="-122"/>
                 <a:cs typeface="Yu Gothic" pitchFamily="34" charset="-120"/>
               </a:rPr>
-              <a:t>30秒〜1分</a:t>
-            </a:r>
-            <a:endParaRPr lang="en-US" sz="2000" dirty="0"/>
+              <a:t>1分の録画</a:t>
+            </a:r>
+            <a:endParaRPr lang="en-US" sz="2400" dirty="0"/>
           </a:p>
         </p:txBody>
       </p:sp>
@@ -14381,7 +14439,7 @@
                 <a:ea typeface="Yu Gothic" pitchFamily="34" charset="-122"/>
                 <a:cs typeface="Yu Gothic" pitchFamily="34" charset="-120"/>
               </a:rPr>
-              <a:t>届いたまとめ・録画・会話を見て決めるだけ。対面の面接はいりません</a:t>
+              <a:t>届いた録画と選んだ答えを見て決めるだけ。対面の面接はいりません</a:t>
             </a:r>
             <a:endParaRPr lang="en-US" sz="1400" dirty="0"/>
           </a:p>
@@ -14729,7 +14787,7 @@
                 <a:ea typeface="Yu Gothic" pitchFamily="34" charset="-122"/>
                 <a:cs typeface="Yu Gothic" pitchFamily="34" charset="-120"/>
               </a:rPr>
-              <a:t>受け終わると、まとめ・入れる日と時間・写真・録画・会話が届きます</a:t>
+              <a:t>受け終わると、録画・写真・選んだ答えの一覧・話し方の雰囲気のまとめが届きます</a:t>
             </a:r>
             <a:endParaRPr lang="en-US" sz="1400" dirty="0"/>
           </a:p>
@@ -15116,7 +15174,7 @@
                 <a:ea typeface="Yu Gothic" pitchFamily="34" charset="-122"/>
                 <a:cs typeface="Yu Gothic" pitchFamily="34" charset="-120"/>
               </a:rPr>
-              <a:t>応募者がAIと話す時間は10〜15分です。AIは合否を決めません。採用はお店が決めます。</a:t>
+              <a:t>応募者は、ボタンで選ぶのに1分ほど・AIと話すのが1分ほど。AIは合否を決めません。採用はお店が決めます。</a:t>
             </a:r>
             <a:endParaRPr lang="en-US" sz="1000" dirty="0"/>
           </a:p>
@@ -15244,12 +15302,12 @@
         </p:nvSpPr>
         <p:spPr>
           <a:xfrm>
-            <a:off x="6391656" y="1499616"/>
-            <a:ext cx="5230368" cy="3675888"/>
+            <a:off x="6391656" y="1682496"/>
+            <a:ext cx="5230368" cy="3172968"/>
           </a:xfrm>
           <a:prstGeom prst="roundRect">
             <a:avLst>
-              <a:gd name="adj" fmla="val 2488"/>
+              <a:gd name="adj" fmla="val 2882"/>
             </a:avLst>
           </a:prstGeom>
           <a:solidFill>
@@ -15286,8 +15344,8 @@
         </p:blipFill>
         <p:spPr>
           <a:xfrm>
-            <a:off x="6446520" y="1554480"/>
-            <a:ext cx="5120640" cy="3566160"/>
+            <a:off x="6446520" y="1737360"/>
+            <a:ext cx="5120640" cy="3063240"/>
           </a:xfrm>
           <a:prstGeom prst="rect">
             <a:avLst/>
@@ -15354,7 +15412,7 @@
                 <a:ea typeface="Yu Gothic" pitchFamily="34" charset="-122"/>
                 <a:cs typeface="Yu Gothic" pitchFamily="34" charset="-120"/>
               </a:rPr>
-              <a:t>お店の基準で聞ける</a:t>
+              <a:t>条件が一覧でわかる</a:t>
             </a:r>
             <a:endParaRPr lang="en-US" sz="1700" dirty="0"/>
           </a:p>
@@ -15396,7 +15454,7 @@
                 <a:ea typeface="Yu Gothic" pitchFamily="34" charset="-122"/>
                 <a:cs typeface="Yu Gothic" pitchFamily="34" charset="-120"/>
               </a:rPr>
-              <a:t>ほしい人の条件に合わせた質問を10個まで足せます。「いつもの質問」に保存すれば毎回そのまま。</a:t>
+              <a:t>出勤日数・曜日・時間帯・勤務開始・通勤・経験を、全員が同じボタンで答えます。選んだ答えが一覧で届きます。</a:t>
             </a:r>
             <a:endParaRPr lang="en-US" sz="1350" dirty="0"/>
           </a:p>
@@ -15462,7 +15520,7 @@
                 <a:ea typeface="Yu Gothic" pitchFamily="34" charset="-122"/>
                 <a:cs typeface="Yu Gothic" pitchFamily="34" charset="-120"/>
               </a:rPr>
-              <a:t>全員に同じ質問で、比べやすい</a:t>
+              <a:t>お店の質問も聞ける</a:t>
             </a:r>
             <a:endParaRPr lang="en-US" sz="1700" dirty="0"/>
           </a:p>
@@ -15504,7 +15562,7 @@
                 <a:ea typeface="Yu Gothic" pitchFamily="34" charset="-122"/>
                 <a:cs typeface="Yu Gothic" pitchFamily="34" charset="-120"/>
               </a:rPr>
-              <a:t>職種の質問のあとに、お店の質問を全部聞きます。面接する人による聞きもれがありません。</a:t>
+              <a:t>お店から聞きたいことを3つまで。AIの面接官が会話の中で聞きます。</a:t>
             </a:r>
             <a:endParaRPr lang="en-US" sz="1350" dirty="0"/>
           </a:p>
@@ -15570,7 +15628,7 @@
                 <a:ea typeface="Yu Gothic" pitchFamily="34" charset="-122"/>
                 <a:cs typeface="Yu Gothic" pitchFamily="34" charset="-120"/>
               </a:rPr>
-              <a:t>答え方と雰囲気まで見える</a:t>
+              <a:t>話している姿が見える</a:t>
             </a:r>
             <a:endParaRPr lang="en-US" sz="1700" dirty="0"/>
           </a:p>
@@ -15612,7 +15670,7 @@
                 <a:ea typeface="Yu Gothic" pitchFamily="34" charset="-122"/>
                 <a:cs typeface="Yu Gothic" pitchFamily="34" charset="-120"/>
               </a:rPr>
-              <a:t>入れる日と時間・気になった点のまとめ、写真・はじめの1分の録画・会話の全部。</a:t>
+              <a:t>自己紹介とやってみたい理由を話す姿の録画と顔の写真。雰囲気・話し方・表情がわかります。</a:t>
             </a:r>
             <a:endParaRPr lang="en-US" sz="1350" dirty="0"/>
           </a:p>
@@ -15626,7 +15684,7 @@
         </p:nvSpPr>
         <p:spPr>
           <a:xfrm>
-            <a:off x="6446520" y="5257800"/>
+            <a:off x="6446520" y="4937760"/>
             <a:ext cx="5120640" cy="274320"/>
           </a:xfrm>
           <a:prstGeom prst="rect">
@@ -15690,7 +15748,7 @@
                 <a:ea typeface="Yu Gothic" pitchFamily="34" charset="-122"/>
                 <a:cs typeface="Yu Gothic" pitchFamily="34" charset="-120"/>
               </a:rPr>
-              <a:t>AIは合否を決めません。届いた内容を見て、会うかどうか・採用するかどうかはお店が決めます。</a:t>
+              <a:t>AIは合否を決めません。見た目についてもAIは何も言いません。録画と写真を見て、お店が決めます。</a:t>
             </a:r>
             <a:endParaRPr lang="en-US" sz="1000" dirty="0"/>
           </a:p>
@@ -16272,7 +16330,7 @@
                 <a:ea typeface="Yu Gothic" pitchFamily="34" charset="-122"/>
                 <a:cs typeface="Yu Gothic" pitchFamily="34" charset="-120"/>
               </a:rPr>
-              <a:t>AIと面接</a:t>
+              <a:t>答える</a:t>
             </a:r>
             <a:endParaRPr lang="en-US" sz="1600" dirty="0"/>
           </a:p>
@@ -16311,7 +16369,7 @@
                 <a:ea typeface="Yu Gothic" pitchFamily="34" charset="-122"/>
                 <a:cs typeface="Yu Gothic" pitchFamily="34" charset="-120"/>
               </a:rPr>
-              <a:t>応募者がスマホで10〜15分</a:t>
+              <a:t>ボタンで選んで、AIと1分ほど話す</a:t>
             </a:r>
             <a:endParaRPr lang="en-US" sz="1300" dirty="0"/>
           </a:p>
@@ -16480,7 +16538,7 @@
                 <a:ea typeface="Yu Gothic" pitchFamily="34" charset="-122"/>
                 <a:cs typeface="Yu Gothic" pitchFamily="34" charset="-120"/>
               </a:rPr>
-              <a:t>まとめ・写真・録画・会話が自動で</a:t>
+              <a:t>録画・写真・選んだ答えが自動で</a:t>
             </a:r>
             <a:endParaRPr lang="en-US" sz="1300" dirty="0"/>
           </a:p>

--- a/docs/posupos-sales/posupos-shiryo.pptx
+++ b/docs/posupos-sales/posupos-shiryo.pptx
@@ -9540,7 +9540,7 @@
                 <a:ea typeface="Yu Gothic" pitchFamily="34" charset="-122"/>
                 <a:cs typeface="Yu Gothic" pitchFamily="34" charset="-120"/>
               </a:rPr>
-              <a:t>通常 昼33,000円／夜40,000円</a:t>
+              <a:t>今申し込んだお店は、ずっとこの価格</a:t>
             </a:r>
             <a:endParaRPr lang="en-US" sz="1100" dirty="0"/>
           </a:p>
@@ -10611,7 +10611,7 @@
                 <a:ea typeface="Yu Gothic" pitchFamily="34" charset="-122"/>
                 <a:cs typeface="Yu Gothic" pitchFamily="34" charset="-120"/>
               </a:rPr>
-              <a:t>5店舗まで。料金は1店舗ごと（足した日からの日割り）。</a:t>
+              <a:t>何店舗でも。料金は1店舗ごと（足した日からの日割り）。</a:t>
             </a:r>
             <a:endParaRPr lang="en-US" sz="1400" dirty="0"/>
           </a:p>

--- a/docs/posupos-sales/posupos-shiryo.pptx
+++ b/docs/posupos-sales/posupos-shiryo.pptx
@@ -9063,24 +9063,24 @@
         </p:nvSpPr>
         <p:spPr>
           <a:xfrm>
-            <a:off x="822960" y="2560320"/>
-            <a:ext cx="2971800" cy="548640"/>
-          </a:xfrm>
-          <a:prstGeom prst="rect">
-            <a:avLst/>
-          </a:prstGeom>
-          <a:noFill/>
-          <a:ln/>
-        </p:spPr>
-        <p:txBody>
-          <a:bodyPr wrap="square" lIns="0" tIns="0" rIns="0" bIns="0" rtlCol="0" anchor="ctr"/>
-          <a:lstStyle/>
-          <a:p>
-            <a:pPr indent="0" marL="0">
-              <a:buNone/>
-            </a:pPr>
-            <a:r>
-              <a:rPr lang="en-US" sz="1300" dirty="0">
+            <a:off x="822960" y="2651760"/>
+            <a:ext cx="2971800" cy="457200"/>
+          </a:xfrm>
+          <a:prstGeom prst="rect">
+            <a:avLst/>
+          </a:prstGeom>
+          <a:noFill/>
+          <a:ln/>
+        </p:spPr>
+        <p:txBody>
+          <a:bodyPr wrap="square" lIns="0" tIns="0" rIns="0" bIns="0" rtlCol="0" anchor="t"/>
+          <a:lstStyle/>
+          <a:p>
+            <a:pPr indent="0" marL="0">
+              <a:buNone/>
+            </a:pPr>
+            <a:r>
+              <a:rPr lang="en-US" sz="1500" b="1" dirty="0">
                 <a:solidFill>
                   <a:srgbClr val="13234A"/>
                 </a:solidFill>
@@ -9088,35 +9088,7 @@
                 <a:ea typeface="Yu Gothic" pitchFamily="34" charset="-122"/>
                 <a:cs typeface="Yu Gothic" pitchFamily="34" charset="-120"/>
               </a:rPr>
-              <a:t>月額 </a:t>
-            </a:r>
-            <a:pPr indent="0" marL="0">
-              <a:buNone/>
-            </a:pPr>
-            <a:r>
-              <a:rPr lang="en-US" sz="2400" b="1" dirty="0">
-                <a:solidFill>
-                  <a:srgbClr val="13234A"/>
-                </a:solidFill>
-                <a:latin typeface="Yu Gothic" pitchFamily="34" charset="0"/>
-                <a:ea typeface="Yu Gothic" pitchFamily="34" charset="-122"/>
-                <a:cs typeface="Yu Gothic" pitchFamily="34" charset="-120"/>
-              </a:rPr>
-              <a:t>11,000円</a:t>
-            </a:r>
-            <a:pPr indent="0" marL="0">
-              <a:buNone/>
-            </a:pPr>
-            <a:r>
-              <a:rPr lang="en-US" sz="1100" dirty="0">
-                <a:solidFill>
-                  <a:srgbClr val="13234A"/>
-                </a:solidFill>
-                <a:latin typeface="Yu Gothic" pitchFamily="34" charset="0"/>
-                <a:ea typeface="Yu Gothic" pitchFamily="34" charset="-122"/>
-                <a:cs typeface="Yu Gothic" pitchFamily="34" charset="-120"/>
-              </a:rPr>
-              <a:t>（税込）</a:t>
+              <a:t>料金：お見積もり（1店舗ごと）</a:t>
             </a:r>
             <a:endParaRPr lang="en-US" sz="1500" dirty="0"/>
           </a:p>
@@ -9130,8 +9102,8 @@
         </p:nvSpPr>
         <p:spPr>
           <a:xfrm>
-            <a:off x="822960" y="3794760"/>
-            <a:ext cx="2971800" cy="1828800"/>
+            <a:off x="822960" y="3337560"/>
+            <a:ext cx="2971800" cy="2194560"/>
           </a:xfrm>
           <a:prstGeom prst="rect">
             <a:avLst/>
@@ -9322,7 +9294,7 @@
                 <a:ea typeface="Yu Gothic" pitchFamily="34" charset="-122"/>
                 <a:cs typeface="Yu Gothic" pitchFamily="34" charset="-120"/>
               </a:rPr>
-              <a:t>キャンペーン価格・おすすめ</a:t>
+              <a:t>おすすめ</a:t>
             </a:r>
             <a:endParaRPr lang="en-US" sz="1200" dirty="0"/>
           </a:p>
@@ -9414,8 +9386,8 @@
         </p:nvSpPr>
         <p:spPr>
           <a:xfrm>
-            <a:off x="4599432" y="2514600"/>
-            <a:ext cx="2971800" cy="274320"/>
+            <a:off x="4599432" y="2651760"/>
+            <a:ext cx="2971800" cy="457200"/>
           </a:xfrm>
           <a:prstGeom prst="rect">
             <a:avLst/>
@@ -9431,17 +9403,17 @@
               <a:buNone/>
             </a:pPr>
             <a:r>
-              <a:rPr lang="en-US" sz="1200" dirty="0">
-                <a:solidFill>
-                  <a:srgbClr val="4A5878"/>
-                </a:solidFill>
-                <a:latin typeface="Yu Gothic" pitchFamily="34" charset="0"/>
-                <a:ea typeface="Yu Gothic" pitchFamily="34" charset="-122"/>
-                <a:cs typeface="Yu Gothic" pitchFamily="34" charset="-120"/>
-              </a:rPr>
-              <a:t>月額（税込）</a:t>
-            </a:r>
-            <a:endParaRPr lang="en-US" sz="1200" dirty="0"/>
+              <a:rPr lang="en-US" sz="1500" b="1" dirty="0">
+                <a:solidFill>
+                  <a:srgbClr val="1557D6"/>
+                </a:solidFill>
+                <a:latin typeface="Yu Gothic" pitchFamily="34" charset="0"/>
+                <a:ea typeface="Yu Gothic" pitchFamily="34" charset="-122"/>
+                <a:cs typeface="Yu Gothic" pitchFamily="34" charset="-120"/>
+              </a:rPr>
+              <a:t>料金：お見積もり（1店舗ごと）</a:t>
+            </a:r>
+            <a:endParaRPr lang="en-US" sz="1500" dirty="0"/>
           </a:p>
         </p:txBody>
       </p:sp>
@@ -9453,109 +9425,8 @@
         </p:nvSpPr>
         <p:spPr>
           <a:xfrm>
-            <a:off x="4599432" y="2743200"/>
-            <a:ext cx="2971800" cy="685800"/>
-          </a:xfrm>
-          <a:prstGeom prst="rect">
-            <a:avLst/>
-          </a:prstGeom>
-          <a:noFill/>
-          <a:ln/>
-        </p:spPr>
-        <p:txBody>
-          <a:bodyPr wrap="square" lIns="0" tIns="0" rIns="0" bIns="0" rtlCol="0" anchor="t"/>
-          <a:lstStyle/>
-          <a:p>
-            <a:pPr indent="0" marL="0">
-              <a:lnSpc>
-                <a:spcPct val="100000"/>
-              </a:lnSpc>
-              <a:buNone/>
-            </a:pPr>
-            <a:r>
-              <a:rPr lang="en-US" sz="1900" b="1" dirty="0">
-                <a:solidFill>
-                  <a:srgbClr val="1557D6"/>
-                </a:solidFill>
-                <a:latin typeface="Yu Gothic" pitchFamily="34" charset="0"/>
-                <a:ea typeface="Yu Gothic" pitchFamily="34" charset="-122"/>
-                <a:cs typeface="Yu Gothic" pitchFamily="34" charset="-120"/>
-              </a:rPr>
-              <a:t>昼 22,000円</a:t>
-            </a:r>
-            <a:endParaRPr lang="en-US" sz="1900" dirty="0"/>
-          </a:p>
-          <a:p>
-            <a:pPr indent="0" marL="0">
-              <a:lnSpc>
-                <a:spcPct val="100000"/>
-              </a:lnSpc>
-              <a:buNone/>
-            </a:pPr>
-            <a:r>
-              <a:rPr lang="en-US" sz="1900" b="1" dirty="0">
-                <a:solidFill>
-                  <a:srgbClr val="1557D6"/>
-                </a:solidFill>
-                <a:latin typeface="Yu Gothic" pitchFamily="34" charset="0"/>
-                <a:ea typeface="Yu Gothic" pitchFamily="34" charset="-122"/>
-                <a:cs typeface="Yu Gothic" pitchFamily="34" charset="-120"/>
-              </a:rPr>
-              <a:t>夜 33,000円</a:t>
-            </a:r>
-            <a:endParaRPr lang="en-US" sz="1900" dirty="0"/>
-          </a:p>
-        </p:txBody>
-      </p:sp>
-      <p:sp>
-        <p:nvSpPr>
-          <p:cNvPr id="15" name="Text 13"/>
-          <p:cNvSpPr txBox="1"/>
-          <p:nvPr/>
-        </p:nvSpPr>
-        <p:spPr>
-          <a:xfrm>
-            <a:off x="4599432" y="3429000"/>
-            <a:ext cx="2971800" cy="274320"/>
-          </a:xfrm>
-          <a:prstGeom prst="rect">
-            <a:avLst/>
-          </a:prstGeom>
-          <a:noFill/>
-          <a:ln/>
-        </p:spPr>
-        <p:txBody>
-          <a:bodyPr wrap="square" lIns="0" tIns="0" rIns="0" bIns="0" rtlCol="0" anchor="t"/>
-          <a:lstStyle/>
-          <a:p>
-            <a:pPr indent="0" marL="0">
-              <a:buNone/>
-            </a:pPr>
-            <a:r>
-              <a:rPr lang="en-US" sz="1100" dirty="0">
-                <a:solidFill>
-                  <a:srgbClr val="4A5878"/>
-                </a:solidFill>
-                <a:latin typeface="Yu Gothic" pitchFamily="34" charset="0"/>
-                <a:ea typeface="Yu Gothic" pitchFamily="34" charset="-122"/>
-                <a:cs typeface="Yu Gothic" pitchFamily="34" charset="-120"/>
-              </a:rPr>
-              <a:t>今申し込んだお店は、ずっとこの価格</a:t>
-            </a:r>
-            <a:endParaRPr lang="en-US" sz="1100" dirty="0"/>
-          </a:p>
-        </p:txBody>
-      </p:sp>
-      <p:sp>
-        <p:nvSpPr>
-          <p:cNvPr id="16" name="Text 14"/>
-          <p:cNvSpPr txBox="1"/>
-          <p:nvPr/>
-        </p:nvSpPr>
-        <p:spPr>
-          <a:xfrm>
-            <a:off x="4599432" y="3794760"/>
-            <a:ext cx="2971800" cy="1828800"/>
+            <a:off x="4599432" y="3337560"/>
+            <a:ext cx="2971800" cy="2194560"/>
           </a:xfrm>
           <a:prstGeom prst="rect">
             <a:avLst/>
@@ -9654,7 +9525,7 @@
       </p:sp>
       <p:sp>
         <p:nvSpPr>
-          <p:cNvPr id="17" name="Shape 15"/>
+          <p:cNvPr id="15" name="Shape 13"/>
           <p:cNvSpPr/>
           <p:nvPr/>
         </p:nvSpPr>
@@ -9681,7 +9552,7 @@
       </p:sp>
       <p:sp>
         <p:nvSpPr>
-          <p:cNvPr id="18" name="Text 16"/>
+          <p:cNvPr id="16" name="Text 14"/>
           <p:cNvSpPr txBox="1"/>
           <p:nvPr/>
         </p:nvSpPr>
@@ -9720,7 +9591,7 @@
       </p:sp>
       <p:sp>
         <p:nvSpPr>
-          <p:cNvPr id="19" name="Text 17"/>
+          <p:cNvPr id="17" name="Text 15"/>
           <p:cNvSpPr txBox="1"/>
           <p:nvPr/>
         </p:nvSpPr>
@@ -9759,30 +9630,30 @@
       </p:sp>
       <p:sp>
         <p:nvSpPr>
-          <p:cNvPr id="20" name="Text 18"/>
-          <p:cNvSpPr txBox="1"/>
-          <p:nvPr/>
-        </p:nvSpPr>
-        <p:spPr>
-          <a:xfrm>
-            <a:off x="8375904" y="2560320"/>
-            <a:ext cx="2971800" cy="548640"/>
-          </a:xfrm>
-          <a:prstGeom prst="rect">
-            <a:avLst/>
-          </a:prstGeom>
-          <a:noFill/>
-          <a:ln/>
-        </p:spPr>
-        <p:txBody>
-          <a:bodyPr wrap="square" lIns="0" tIns="0" rIns="0" bIns="0" rtlCol="0" anchor="ctr"/>
-          <a:lstStyle/>
-          <a:p>
-            <a:pPr indent="0" marL="0">
-              <a:buNone/>
-            </a:pPr>
-            <a:r>
-              <a:rPr lang="en-US" sz="1300" dirty="0">
+          <p:cNvPr id="18" name="Text 16"/>
+          <p:cNvSpPr txBox="1"/>
+          <p:nvPr/>
+        </p:nvSpPr>
+        <p:spPr>
+          <a:xfrm>
+            <a:off x="8375904" y="2651760"/>
+            <a:ext cx="2971800" cy="457200"/>
+          </a:xfrm>
+          <a:prstGeom prst="rect">
+            <a:avLst/>
+          </a:prstGeom>
+          <a:noFill/>
+          <a:ln/>
+        </p:spPr>
+        <p:txBody>
+          <a:bodyPr wrap="square" lIns="0" tIns="0" rIns="0" bIns="0" rtlCol="0" anchor="t"/>
+          <a:lstStyle/>
+          <a:p>
+            <a:pPr indent="0" marL="0">
+              <a:buNone/>
+            </a:pPr>
+            <a:r>
+              <a:rPr lang="en-US" sz="1500" b="1" dirty="0">
                 <a:solidFill>
                   <a:srgbClr val="13234A"/>
                 </a:solidFill>
@@ -9790,35 +9661,7 @@
                 <a:ea typeface="Yu Gothic" pitchFamily="34" charset="-122"/>
                 <a:cs typeface="Yu Gothic" pitchFamily="34" charset="-120"/>
               </a:rPr>
-              <a:t>月額 </a:t>
-            </a:r>
-            <a:pPr indent="0" marL="0">
-              <a:buNone/>
-            </a:pPr>
-            <a:r>
-              <a:rPr lang="en-US" sz="2400" b="1" dirty="0">
-                <a:solidFill>
-                  <a:srgbClr val="13234A"/>
-                </a:solidFill>
-                <a:latin typeface="Yu Gothic" pitchFamily="34" charset="0"/>
-                <a:ea typeface="Yu Gothic" pitchFamily="34" charset="-122"/>
-                <a:cs typeface="Yu Gothic" pitchFamily="34" charset="-120"/>
-              </a:rPr>
-              <a:t>55,000円〜</a:t>
-            </a:r>
-            <a:pPr indent="0" marL="0">
-              <a:buNone/>
-            </a:pPr>
-            <a:r>
-              <a:rPr lang="en-US" sz="1100" dirty="0">
-                <a:solidFill>
-                  <a:srgbClr val="13234A"/>
-                </a:solidFill>
-                <a:latin typeface="Yu Gothic" pitchFamily="34" charset="0"/>
-                <a:ea typeface="Yu Gothic" pitchFamily="34" charset="-122"/>
-                <a:cs typeface="Yu Gothic" pitchFamily="34" charset="-120"/>
-              </a:rPr>
-              <a:t>（税込）</a:t>
+              <a:t>料金：お見積もり（1店舗ごと）</a:t>
             </a:r>
             <a:endParaRPr lang="en-US" sz="1500" dirty="0"/>
           </a:p>
@@ -9826,14 +9669,14 @@
       </p:sp>
       <p:sp>
         <p:nvSpPr>
-          <p:cNvPr id="21" name="Text 19"/>
-          <p:cNvSpPr txBox="1"/>
-          <p:nvPr/>
-        </p:nvSpPr>
-        <p:spPr>
-          <a:xfrm>
-            <a:off x="8375904" y="3794760"/>
-            <a:ext cx="2971800" cy="1828800"/>
+          <p:cNvPr id="19" name="Text 17"/>
+          <p:cNvSpPr txBox="1"/>
+          <p:nvPr/>
+        </p:nvSpPr>
+        <p:spPr>
+          <a:xfrm>
+            <a:off x="8375904" y="3337560"/>
+            <a:ext cx="2971800" cy="2194560"/>
           </a:xfrm>
           <a:prstGeom prst="rect">
             <a:avLst/>
@@ -9932,7 +9775,7 @@
       </p:sp>
       <p:sp>
         <p:nvSpPr>
-          <p:cNvPr id="22" name="Text 20"/>
+          <p:cNvPr id="20" name="Text 18"/>
           <p:cNvSpPr txBox="1"/>
           <p:nvPr/>
         </p:nvSpPr>
@@ -9963,7 +9806,7 @@
                 <a:ea typeface="Yu Gothic" pitchFamily="34" charset="-122"/>
                 <a:cs typeface="Yu Gothic" pitchFamily="34" charset="-120"/>
               </a:rPr>
-              <a:t>料金は1店舗ごと・初期費用0円・1か月無料。キャンペーン期間中のお申し込みは、契約が続くかぎりキャンペーン価格のまま（予告なく終了する場合があります）。</a:t>
+              <a:t>料金は1店舗ごとに、お店に合わせてお見積もりします。0円から始められます（※ プランによって、最初の1か月を無料でお試しいただけます）。</a:t>
             </a:r>
             <a:endParaRPr lang="en-US" sz="1000" dirty="0"/>
           </a:p>
@@ -10077,7 +9920,7 @@
                 <a:ea typeface="Yu Gothic" pitchFamily="34" charset="-122"/>
                 <a:cs typeface="Yu Gothic" pitchFamily="34" charset="-120"/>
               </a:rPr>
-              <a:t>グループ店・年間契約・導入の流れ</a:t>
+              <a:t>グループ店・導入の流れ</a:t>
             </a:r>
             <a:endParaRPr lang="en-US" sz="3000" dirty="0"/>
           </a:p>
@@ -10092,11 +9935,11 @@
         <p:spPr>
           <a:xfrm>
             <a:off x="548640" y="1508760"/>
-            <a:ext cx="1691640" cy="1645920"/>
+            <a:ext cx="5486400" cy="1874520"/>
           </a:xfrm>
           <a:prstGeom prst="roundRect">
             <a:avLst>
-              <a:gd name="adj" fmla="val 8333"/>
+              <a:gd name="adj" fmla="val 7317"/>
             </a:avLst>
           </a:prstGeom>
           <a:solidFill>
@@ -10112,143 +9955,26 @@
       </p:sp>
       <p:sp>
         <p:nvSpPr>
-          <p:cNvPr id="4" name="Text 2"/>
-          <p:cNvSpPr txBox="1"/>
-          <p:nvPr/>
-        </p:nvSpPr>
-        <p:spPr>
-          <a:xfrm>
-            <a:off x="731520" y="1645920"/>
-            <a:ext cx="1371600" cy="320040"/>
-          </a:xfrm>
-          <a:prstGeom prst="rect">
-            <a:avLst/>
-          </a:prstGeom>
-          <a:noFill/>
-          <a:ln/>
-        </p:spPr>
-        <p:txBody>
-          <a:bodyPr wrap="square" lIns="0" tIns="0" rIns="0" bIns="0" rtlCol="0" anchor="t"/>
-          <a:lstStyle/>
-          <a:p>
-            <a:pPr indent="0" marL="0">
-              <a:buNone/>
-            </a:pPr>
-            <a:r>
-              <a:rPr lang="en-US" sz="1300" b="1" dirty="0">
-                <a:solidFill>
-                  <a:srgbClr val="6A5530"/>
-                </a:solidFill>
-                <a:latin typeface="Yu Gothic" pitchFamily="34" charset="0"/>
-                <a:ea typeface="Yu Gothic" pitchFamily="34" charset="-122"/>
-                <a:cs typeface="Yu Gothic" pitchFamily="34" charset="-120"/>
-              </a:rPr>
-              <a:t>1年契約</a:t>
-            </a:r>
-            <a:endParaRPr lang="en-US" sz="1300" dirty="0"/>
-          </a:p>
-        </p:txBody>
-      </p:sp>
-      <p:sp>
-        <p:nvSpPr>
-          <p:cNvPr id="5" name="Text 3"/>
-          <p:cNvSpPr txBox="1"/>
-          <p:nvPr/>
-        </p:nvSpPr>
-        <p:spPr>
-          <a:xfrm>
-            <a:off x="685800" y="2011680"/>
-            <a:ext cx="1463040" cy="548640"/>
-          </a:xfrm>
-          <a:prstGeom prst="rect">
-            <a:avLst/>
-          </a:prstGeom>
-          <a:noFill/>
-          <a:ln/>
-        </p:spPr>
-        <p:txBody>
-          <a:bodyPr wrap="square" lIns="0" tIns="0" rIns="0" bIns="0" rtlCol="0" anchor="t"/>
-          <a:lstStyle/>
-          <a:p>
-            <a:pPr indent="0" marL="0">
-              <a:buNone/>
-            </a:pPr>
-            <a:r>
-              <a:rPr lang="en-US" sz="2400" b="1" dirty="0">
-                <a:solidFill>
-                  <a:srgbClr val="B26B00"/>
-                </a:solidFill>
-                <a:latin typeface="Yu Gothic" pitchFamily="34" charset="0"/>
-                <a:ea typeface="Yu Gothic" pitchFamily="34" charset="-122"/>
-                <a:cs typeface="Yu Gothic" pitchFamily="34" charset="-120"/>
-              </a:rPr>
-              <a:t>1か月分</a:t>
-            </a:r>
-            <a:endParaRPr lang="en-US" sz="2400" dirty="0"/>
-          </a:p>
-        </p:txBody>
-      </p:sp>
-      <p:sp>
-        <p:nvSpPr>
-          <p:cNvPr id="6" name="Text 4"/>
-          <p:cNvSpPr txBox="1"/>
-          <p:nvPr/>
-        </p:nvSpPr>
-        <p:spPr>
-          <a:xfrm>
-            <a:off x="731520" y="2606040"/>
-            <a:ext cx="1371600" cy="320040"/>
-          </a:xfrm>
-          <a:prstGeom prst="rect">
-            <a:avLst/>
-          </a:prstGeom>
-          <a:noFill/>
-          <a:ln/>
-        </p:spPr>
-        <p:txBody>
-          <a:bodyPr wrap="square" lIns="0" tIns="0" rIns="0" bIns="0" rtlCol="0" anchor="t"/>
-          <a:lstStyle/>
-          <a:p>
-            <a:pPr indent="0" marL="0">
-              <a:buNone/>
-            </a:pPr>
-            <a:r>
-              <a:rPr lang="en-US" sz="1300" dirty="0">
-                <a:solidFill>
-                  <a:srgbClr val="6A5530"/>
-                </a:solidFill>
-                <a:latin typeface="Yu Gothic" pitchFamily="34" charset="0"/>
-                <a:ea typeface="Yu Gothic" pitchFamily="34" charset="-122"/>
-                <a:cs typeface="Yu Gothic" pitchFamily="34" charset="-120"/>
-              </a:rPr>
-              <a:t>おトク</a:t>
-            </a:r>
-            <a:endParaRPr lang="en-US" sz="1300" dirty="0"/>
-          </a:p>
-        </p:txBody>
-      </p:sp>
-      <p:sp>
-        <p:nvSpPr>
-          <p:cNvPr id="7" name="Shape 5"/>
+          <p:cNvPr id="4" name="Shape 2"/>
           <p:cNvSpPr/>
           <p:nvPr/>
         </p:nvSpPr>
         <p:spPr>
           <a:xfrm>
-            <a:off x="2423160" y="1508760"/>
-            <a:ext cx="1691640" cy="1645920"/>
+            <a:off x="548640" y="3611880"/>
+            <a:ext cx="5486400" cy="1874520"/>
           </a:xfrm>
           <a:prstGeom prst="roundRect">
             <a:avLst>
-              <a:gd name="adj" fmla="val 8333"/>
+              <a:gd name="adj" fmla="val 7317"/>
             </a:avLst>
           </a:prstGeom>
           <a:solidFill>
-            <a:srgbClr val="FFF4DB"/>
+            <a:srgbClr val="EEF3FF"/>
           </a:solidFill>
           <a:ln w="12700">
             <a:solidFill>
-              <a:srgbClr val="FFF4DB"/>
+              <a:srgbClr val="EEF3FF"/>
             </a:solidFill>
             <a:prstDash val="solid"/>
           </a:ln>
@@ -10256,14 +9982,14 @@
       </p:sp>
       <p:sp>
         <p:nvSpPr>
-          <p:cNvPr id="8" name="Text 6"/>
-          <p:cNvSpPr txBox="1"/>
-          <p:nvPr/>
-        </p:nvSpPr>
-        <p:spPr>
-          <a:xfrm>
-            <a:off x="2606040" y="1645920"/>
-            <a:ext cx="1371600" cy="320040"/>
+          <p:cNvPr id="5" name="Text 3"/>
+          <p:cNvSpPr txBox="1"/>
+          <p:nvPr/>
+        </p:nvSpPr>
+        <p:spPr>
+          <a:xfrm>
+            <a:off x="822960" y="1691640"/>
+            <a:ext cx="4937760" cy="1645920"/>
           </a:xfrm>
           <a:prstGeom prst="rect">
             <a:avLst/>
@@ -10276,33 +10002,56 @@
           <a:lstStyle/>
           <a:p>
             <a:pPr indent="0" marL="0">
-              <a:buNone/>
-            </a:pPr>
-            <a:r>
-              <a:rPr lang="en-US" sz="1300" b="1" dirty="0">
-                <a:solidFill>
-                  <a:srgbClr val="6A5530"/>
-                </a:solidFill>
-                <a:latin typeface="Yu Gothic" pitchFamily="34" charset="0"/>
-                <a:ea typeface="Yu Gothic" pitchFamily="34" charset="-122"/>
-                <a:cs typeface="Yu Gothic" pitchFamily="34" charset="-120"/>
-              </a:rPr>
-              <a:t>2年契約</a:t>
-            </a:r>
-            <a:endParaRPr lang="en-US" sz="1300" dirty="0"/>
-          </a:p>
-        </p:txBody>
-      </p:sp>
-      <p:sp>
-        <p:nvSpPr>
-          <p:cNvPr id="9" name="Text 7"/>
-          <p:cNvSpPr txBox="1"/>
-          <p:nvPr/>
-        </p:nvSpPr>
-        <p:spPr>
-          <a:xfrm>
-            <a:off x="2560320" y="2011680"/>
-            <a:ext cx="1463040" cy="548640"/>
+              <a:spcAft>
+                <a:spcPts val="600"/>
+              </a:spcAft>
+              <a:buNone/>
+            </a:pPr>
+            <a:r>
+              <a:rPr lang="en-US" sz="2000" b="1" dirty="0">
+                <a:solidFill>
+                  <a:srgbClr val="13234A"/>
+                </a:solidFill>
+                <a:latin typeface="Yu Gothic" pitchFamily="34" charset="0"/>
+                <a:ea typeface="Yu Gothic" pitchFamily="34" charset="-122"/>
+                <a:cs typeface="Yu Gothic" pitchFamily="34" charset="-120"/>
+              </a:rPr>
+              <a:t>グループ店</a:t>
+            </a:r>
+            <a:endParaRPr lang="en-US" sz="1500" dirty="0"/>
+          </a:p>
+          <a:p>
+            <a:pPr indent="0" marL="0">
+              <a:spcAft>
+                <a:spcPts val="600"/>
+              </a:spcAft>
+              <a:buNone/>
+            </a:pPr>
+            <a:r>
+              <a:rPr lang="en-US" sz="1500" dirty="0">
+                <a:solidFill>
+                  <a:srgbClr val="13234A"/>
+                </a:solidFill>
+                <a:latin typeface="Yu Gothic" pitchFamily="34" charset="0"/>
+                <a:ea typeface="Yu Gothic" pitchFamily="34" charset="-122"/>
+                <a:cs typeface="Yu Gothic" pitchFamily="34" charset="-120"/>
+              </a:rPr>
+              <a:t>何店舗でも足せます。料金は1店舗ごと（足した日からの日割り）。スタッフ・キャストのスマホでは、お店を切りかえて使えます。</a:t>
+            </a:r>
+            <a:endParaRPr lang="en-US" sz="1500" dirty="0"/>
+          </a:p>
+        </p:txBody>
+      </p:sp>
+      <p:sp>
+        <p:nvSpPr>
+          <p:cNvPr id="6" name="Text 4"/>
+          <p:cNvSpPr txBox="1"/>
+          <p:nvPr/>
+        </p:nvSpPr>
+        <p:spPr>
+          <a:xfrm>
+            <a:off x="822960" y="3749040"/>
+            <a:ext cx="4937760" cy="1645920"/>
           </a:xfrm>
           <a:prstGeom prst="rect">
             <a:avLst/>
@@ -10315,235 +10064,13 @@
           <a:lstStyle/>
           <a:p>
             <a:pPr indent="0" marL="0">
-              <a:buNone/>
-            </a:pPr>
-            <a:r>
-              <a:rPr lang="en-US" sz="2400" b="1" dirty="0">
-                <a:solidFill>
-                  <a:srgbClr val="B26B00"/>
-                </a:solidFill>
-                <a:latin typeface="Yu Gothic" pitchFamily="34" charset="0"/>
-                <a:ea typeface="Yu Gothic" pitchFamily="34" charset="-122"/>
-                <a:cs typeface="Yu Gothic" pitchFamily="34" charset="-120"/>
-              </a:rPr>
-              <a:t>3か月分</a:t>
-            </a:r>
-            <a:endParaRPr lang="en-US" sz="2400" dirty="0"/>
-          </a:p>
-        </p:txBody>
-      </p:sp>
-      <p:sp>
-        <p:nvSpPr>
-          <p:cNvPr id="10" name="Text 8"/>
-          <p:cNvSpPr txBox="1"/>
-          <p:nvPr/>
-        </p:nvSpPr>
-        <p:spPr>
-          <a:xfrm>
-            <a:off x="2606040" y="2606040"/>
-            <a:ext cx="1371600" cy="320040"/>
-          </a:xfrm>
-          <a:prstGeom prst="rect">
-            <a:avLst/>
-          </a:prstGeom>
-          <a:noFill/>
-          <a:ln/>
-        </p:spPr>
-        <p:txBody>
-          <a:bodyPr wrap="square" lIns="0" tIns="0" rIns="0" bIns="0" rtlCol="0" anchor="t"/>
-          <a:lstStyle/>
-          <a:p>
-            <a:pPr indent="0" marL="0">
-              <a:buNone/>
-            </a:pPr>
-            <a:r>
-              <a:rPr lang="en-US" sz="1300" dirty="0">
-                <a:solidFill>
-                  <a:srgbClr val="6A5530"/>
-                </a:solidFill>
-                <a:latin typeface="Yu Gothic" pitchFamily="34" charset="0"/>
-                <a:ea typeface="Yu Gothic" pitchFamily="34" charset="-122"/>
-                <a:cs typeface="Yu Gothic" pitchFamily="34" charset="-120"/>
-              </a:rPr>
-              <a:t>おトク</a:t>
-            </a:r>
-            <a:endParaRPr lang="en-US" sz="1300" dirty="0"/>
-          </a:p>
-        </p:txBody>
-      </p:sp>
-      <p:sp>
-        <p:nvSpPr>
-          <p:cNvPr id="11" name="Shape 9"/>
-          <p:cNvSpPr/>
-          <p:nvPr/>
-        </p:nvSpPr>
-        <p:spPr>
-          <a:xfrm>
-            <a:off x="4297680" y="1508760"/>
-            <a:ext cx="1691640" cy="1645920"/>
-          </a:xfrm>
-          <a:prstGeom prst="roundRect">
-            <a:avLst>
-              <a:gd name="adj" fmla="val 8333"/>
-            </a:avLst>
-          </a:prstGeom>
-          <a:solidFill>
-            <a:srgbClr val="FFF4DB"/>
-          </a:solidFill>
-          <a:ln w="12700">
-            <a:solidFill>
-              <a:srgbClr val="FFF4DB"/>
-            </a:solidFill>
-            <a:prstDash val="solid"/>
-          </a:ln>
-        </p:spPr>
-      </p:sp>
-      <p:sp>
-        <p:nvSpPr>
-          <p:cNvPr id="12" name="Text 10"/>
-          <p:cNvSpPr txBox="1"/>
-          <p:nvPr/>
-        </p:nvSpPr>
-        <p:spPr>
-          <a:xfrm>
-            <a:off x="4480560" y="1645920"/>
-            <a:ext cx="1371600" cy="320040"/>
-          </a:xfrm>
-          <a:prstGeom prst="rect">
-            <a:avLst/>
-          </a:prstGeom>
-          <a:noFill/>
-          <a:ln/>
-        </p:spPr>
-        <p:txBody>
-          <a:bodyPr wrap="square" lIns="0" tIns="0" rIns="0" bIns="0" rtlCol="0" anchor="t"/>
-          <a:lstStyle/>
-          <a:p>
-            <a:pPr indent="0" marL="0">
-              <a:buNone/>
-            </a:pPr>
-            <a:r>
-              <a:rPr lang="en-US" sz="1300" b="1" dirty="0">
-                <a:solidFill>
-                  <a:srgbClr val="6A5530"/>
-                </a:solidFill>
-                <a:latin typeface="Yu Gothic" pitchFamily="34" charset="0"/>
-                <a:ea typeface="Yu Gothic" pitchFamily="34" charset="-122"/>
-                <a:cs typeface="Yu Gothic" pitchFamily="34" charset="-120"/>
-              </a:rPr>
-              <a:t>3年契約</a:t>
-            </a:r>
-            <a:endParaRPr lang="en-US" sz="1300" dirty="0"/>
-          </a:p>
-        </p:txBody>
-      </p:sp>
-      <p:sp>
-        <p:nvSpPr>
-          <p:cNvPr id="13" name="Text 11"/>
-          <p:cNvSpPr txBox="1"/>
-          <p:nvPr/>
-        </p:nvSpPr>
-        <p:spPr>
-          <a:xfrm>
-            <a:off x="4434840" y="2011680"/>
-            <a:ext cx="1463040" cy="548640"/>
-          </a:xfrm>
-          <a:prstGeom prst="rect">
-            <a:avLst/>
-          </a:prstGeom>
-          <a:noFill/>
-          <a:ln/>
-        </p:spPr>
-        <p:txBody>
-          <a:bodyPr wrap="square" lIns="0" tIns="0" rIns="0" bIns="0" rtlCol="0" anchor="t"/>
-          <a:lstStyle/>
-          <a:p>
-            <a:pPr indent="0" marL="0">
-              <a:buNone/>
-            </a:pPr>
-            <a:r>
-              <a:rPr lang="en-US" sz="2400" b="1" dirty="0">
-                <a:solidFill>
-                  <a:srgbClr val="B26B00"/>
-                </a:solidFill>
-                <a:latin typeface="Yu Gothic" pitchFamily="34" charset="0"/>
-                <a:ea typeface="Yu Gothic" pitchFamily="34" charset="-122"/>
-                <a:cs typeface="Yu Gothic" pitchFamily="34" charset="-120"/>
-              </a:rPr>
-              <a:t>5か月分</a:t>
-            </a:r>
-            <a:endParaRPr lang="en-US" sz="2400" dirty="0"/>
-          </a:p>
-        </p:txBody>
-      </p:sp>
-      <p:sp>
-        <p:nvSpPr>
-          <p:cNvPr id="14" name="Text 12"/>
-          <p:cNvSpPr txBox="1"/>
-          <p:nvPr/>
-        </p:nvSpPr>
-        <p:spPr>
-          <a:xfrm>
-            <a:off x="4480560" y="2606040"/>
-            <a:ext cx="1371600" cy="320040"/>
-          </a:xfrm>
-          <a:prstGeom prst="rect">
-            <a:avLst/>
-          </a:prstGeom>
-          <a:noFill/>
-          <a:ln/>
-        </p:spPr>
-        <p:txBody>
-          <a:bodyPr wrap="square" lIns="0" tIns="0" rIns="0" bIns="0" rtlCol="0" anchor="t"/>
-          <a:lstStyle/>
-          <a:p>
-            <a:pPr indent="0" marL="0">
-              <a:buNone/>
-            </a:pPr>
-            <a:r>
-              <a:rPr lang="en-US" sz="1300" dirty="0">
-                <a:solidFill>
-                  <a:srgbClr val="6A5530"/>
-                </a:solidFill>
-                <a:latin typeface="Yu Gothic" pitchFamily="34" charset="0"/>
-                <a:ea typeface="Yu Gothic" pitchFamily="34" charset="-122"/>
-                <a:cs typeface="Yu Gothic" pitchFamily="34" charset="-120"/>
-              </a:rPr>
-              <a:t>おトク</a:t>
-            </a:r>
-            <a:endParaRPr lang="en-US" sz="1300" dirty="0"/>
-          </a:p>
-        </p:txBody>
-      </p:sp>
-      <p:sp>
-        <p:nvSpPr>
-          <p:cNvPr id="15" name="Text 13"/>
-          <p:cNvSpPr txBox="1"/>
-          <p:nvPr/>
-        </p:nvSpPr>
-        <p:spPr>
-          <a:xfrm>
-            <a:off x="548640" y="3383280"/>
-            <a:ext cx="5486400" cy="2377440"/>
-          </a:xfrm>
-          <a:prstGeom prst="rect">
-            <a:avLst/>
-          </a:prstGeom>
-          <a:noFill/>
-          <a:ln/>
-        </p:spPr>
-        <p:txBody>
-          <a:bodyPr wrap="square" lIns="0" tIns="0" rIns="0" bIns="0" rtlCol="0" anchor="t"/>
-          <a:lstStyle/>
-          <a:p>
-            <a:pPr indent="0" marL="0">
               <a:spcAft>
-                <a:spcPts val="400"/>
+                <a:spcPts val="600"/>
               </a:spcAft>
               <a:buNone/>
             </a:pPr>
             <a:r>
-              <a:rPr lang="en-US" sz="1400" b="1" dirty="0">
+              <a:rPr lang="en-US" sz="2000" b="1" dirty="0">
                 <a:solidFill>
                   <a:srgbClr val="13234A"/>
                 </a:solidFill>
@@ -10551,19 +10078,19 @@
                 <a:ea typeface="Yu Gothic" pitchFamily="34" charset="-122"/>
                 <a:cs typeface="Yu Gothic" pitchFamily="34" charset="-120"/>
               </a:rPr>
-              <a:t>年間契約（前払い）</a:t>
-            </a:r>
-            <a:endParaRPr lang="en-US" sz="1400" dirty="0"/>
+              <a:t>料金</a:t>
+            </a:r>
+            <a:endParaRPr lang="en-US" sz="1500" dirty="0"/>
           </a:p>
           <a:p>
             <a:pPr indent="0" marL="0">
               <a:spcAft>
-                <a:spcPts val="400"/>
+                <a:spcPts val="600"/>
               </a:spcAft>
               <a:buNone/>
             </a:pPr>
             <a:r>
-              <a:rPr lang="en-US" sz="1400" dirty="0">
+              <a:rPr lang="en-US" sz="1500" dirty="0">
                 <a:solidFill>
                   <a:srgbClr val="13234A"/>
                 </a:solidFill>
@@ -10571,55 +10098,15 @@
                 <a:ea typeface="Yu Gothic" pitchFamily="34" charset="-122"/>
                 <a:cs typeface="Yu Gothic" pitchFamily="34" charset="-120"/>
               </a:rPr>
-              <a:t>自動では更新しません（終わる1か月前にお知らせ）。途中でやめても、残りの期間のお金はお返しできません。</a:t>
-            </a:r>
-            <a:endParaRPr lang="en-US" sz="1400" dirty="0"/>
-          </a:p>
-          <a:p>
-            <a:pPr indent="0" marL="0">
-              <a:spcAft>
-                <a:spcPts val="400"/>
-              </a:spcAft>
-              <a:buNone/>
-            </a:pPr>
-            <a:r>
-              <a:rPr lang="en-US" sz="1400" b="1" dirty="0">
-                <a:solidFill>
-                  <a:srgbClr val="13234A"/>
-                </a:solidFill>
-                <a:latin typeface="Yu Gothic" pitchFamily="34" charset="0"/>
-                <a:ea typeface="Yu Gothic" pitchFamily="34" charset="-122"/>
-                <a:cs typeface="Yu Gothic" pitchFamily="34" charset="-120"/>
-              </a:rPr>
-              <a:t>グループ店</a:t>
-            </a:r>
-            <a:endParaRPr lang="en-US" sz="1400" dirty="0"/>
-          </a:p>
-          <a:p>
-            <a:pPr indent="0" marL="0">
-              <a:spcAft>
-                <a:spcPts val="400"/>
-              </a:spcAft>
-              <a:buNone/>
-            </a:pPr>
-            <a:r>
-              <a:rPr lang="en-US" sz="1400" dirty="0">
-                <a:solidFill>
-                  <a:srgbClr val="13234A"/>
-                </a:solidFill>
-                <a:latin typeface="Yu Gothic" pitchFamily="34" charset="0"/>
-                <a:ea typeface="Yu Gothic" pitchFamily="34" charset="-122"/>
-                <a:cs typeface="Yu Gothic" pitchFamily="34" charset="-120"/>
-              </a:rPr>
-              <a:t>何店舗でも。料金は1店舗ごと（足した日からの日割り）。</a:t>
-            </a:r>
-            <a:endParaRPr lang="en-US" sz="1400" dirty="0"/>
-          </a:p>
-        </p:txBody>
-      </p:sp>
-      <p:sp>
-        <p:nvSpPr>
-          <p:cNvPr id="16" name="Shape 14"/>
+              <a:t>お店の種類・大きさ・使う機能に合わせて、お見積もりします。0円から始められます（※ プランによって、最初の1か月を無料でお試しいただけます）。</a:t>
+            </a:r>
+            <a:endParaRPr lang="en-US" sz="1500" dirty="0"/>
+          </a:p>
+        </p:txBody>
+      </p:sp>
+      <p:sp>
+        <p:nvSpPr>
+          <p:cNvPr id="7" name="Shape 5"/>
           <p:cNvSpPr/>
           <p:nvPr/>
         </p:nvSpPr>
@@ -10646,7 +10133,7 @@
       </p:sp>
       <p:sp>
         <p:nvSpPr>
-          <p:cNvPr id="17" name="Shape 15"/>
+          <p:cNvPr id="8" name="Shape 6"/>
           <p:cNvSpPr/>
           <p:nvPr/>
         </p:nvSpPr>
@@ -10671,7 +10158,7 @@
       </p:sp>
       <p:sp>
         <p:nvSpPr>
-          <p:cNvPr id="18" name="Text 16"/>
+          <p:cNvPr id="9" name="Text 7"/>
           <p:cNvSpPr txBox="1"/>
           <p:nvPr/>
         </p:nvSpPr>
@@ -10710,7 +10197,7 @@
       </p:sp>
       <p:sp>
         <p:nvSpPr>
-          <p:cNvPr id="19" name="Text 17"/>
+          <p:cNvPr id="10" name="Text 8"/>
           <p:cNvSpPr txBox="1"/>
           <p:nvPr/>
         </p:nvSpPr>
@@ -10749,7 +10236,7 @@
       </p:sp>
       <p:sp>
         <p:nvSpPr>
-          <p:cNvPr id="20" name="Text 18"/>
+          <p:cNvPr id="11" name="Text 9"/>
           <p:cNvSpPr txBox="1"/>
           <p:nvPr/>
         </p:nvSpPr>
@@ -10788,7 +10275,7 @@
       </p:sp>
       <p:sp>
         <p:nvSpPr>
-          <p:cNvPr id="21" name="Shape 19"/>
+          <p:cNvPr id="12" name="Shape 10"/>
           <p:cNvSpPr/>
           <p:nvPr/>
         </p:nvSpPr>
@@ -10815,7 +10302,7 @@
       </p:sp>
       <p:sp>
         <p:nvSpPr>
-          <p:cNvPr id="22" name="Shape 20"/>
+          <p:cNvPr id="13" name="Shape 11"/>
           <p:cNvSpPr/>
           <p:nvPr/>
         </p:nvSpPr>
@@ -10840,7 +10327,7 @@
       </p:sp>
       <p:sp>
         <p:nvSpPr>
-          <p:cNvPr id="23" name="Text 21"/>
+          <p:cNvPr id="14" name="Text 12"/>
           <p:cNvSpPr txBox="1"/>
           <p:nvPr/>
         </p:nvSpPr>
@@ -10879,7 +10366,7 @@
       </p:sp>
       <p:sp>
         <p:nvSpPr>
-          <p:cNvPr id="24" name="Text 22"/>
+          <p:cNvPr id="15" name="Text 13"/>
           <p:cNvSpPr txBox="1"/>
           <p:nvPr/>
         </p:nvSpPr>
@@ -10910,7 +10397,7 @@
                 <a:ea typeface="Yu Gothic" pitchFamily="34" charset="-122"/>
                 <a:cs typeface="Yu Gothic" pitchFamily="34" charset="-120"/>
               </a:rPr>
-              <a:t>1か月無料でお試し</a:t>
+              <a:t>無料でお試し</a:t>
             </a:r>
             <a:endParaRPr lang="en-US" sz="1600" dirty="0"/>
           </a:p>
@@ -10918,7 +10405,7 @@
       </p:sp>
       <p:sp>
         <p:nvSpPr>
-          <p:cNvPr id="25" name="Text 23"/>
+          <p:cNvPr id="16" name="Text 14"/>
           <p:cNvSpPr txBox="1"/>
           <p:nvPr/>
         </p:nvSpPr>
@@ -10957,7 +10444,7 @@
       </p:sp>
       <p:sp>
         <p:nvSpPr>
-          <p:cNvPr id="26" name="Shape 24"/>
+          <p:cNvPr id="17" name="Shape 15"/>
           <p:cNvSpPr/>
           <p:nvPr/>
         </p:nvSpPr>
@@ -10984,7 +10471,7 @@
       </p:sp>
       <p:sp>
         <p:nvSpPr>
-          <p:cNvPr id="27" name="Shape 25"/>
+          <p:cNvPr id="18" name="Shape 16"/>
           <p:cNvSpPr/>
           <p:nvPr/>
         </p:nvSpPr>
@@ -11009,7 +10496,7 @@
       </p:sp>
       <p:sp>
         <p:nvSpPr>
-          <p:cNvPr id="28" name="Text 26"/>
+          <p:cNvPr id="19" name="Text 17"/>
           <p:cNvSpPr txBox="1"/>
           <p:nvPr/>
         </p:nvSpPr>
@@ -11048,7 +10535,7 @@
       </p:sp>
       <p:sp>
         <p:nvSpPr>
-          <p:cNvPr id="29" name="Text 27"/>
+          <p:cNvPr id="20" name="Text 18"/>
           <p:cNvSpPr txBox="1"/>
           <p:nvPr/>
         </p:nvSpPr>
@@ -11079,7 +10566,7 @@
                 <a:ea typeface="Yu Gothic" pitchFamily="34" charset="-122"/>
                 <a:cs typeface="Yu Gothic" pitchFamily="34" charset="-120"/>
               </a:rPr>
-              <a:t>登録・設定</a:t>
+              <a:t>お見積もり・設定</a:t>
             </a:r>
             <a:endParaRPr lang="en-US" sz="1600" dirty="0"/>
           </a:p>
@@ -11087,7 +10574,7 @@
       </p:sp>
       <p:sp>
         <p:nvSpPr>
-          <p:cNvPr id="30" name="Text 28"/>
+          <p:cNvPr id="21" name="Text 19"/>
           <p:cNvSpPr txBox="1"/>
           <p:nvPr/>
         </p:nvSpPr>
@@ -11118,7 +10605,7 @@
                 <a:ea typeface="Yu Gothic" pitchFamily="34" charset="-122"/>
                 <a:cs typeface="Yu Gothic" pitchFamily="34" charset="-120"/>
               </a:rPr>
-              <a:t>ホームページからのお申し込みは登録代行が無料</a:t>
+              <a:t>お店に合わせた料金をご案内して、設定を進めます</a:t>
             </a:r>
             <a:endParaRPr lang="en-US" sz="1300" dirty="0"/>
           </a:p>
@@ -11126,7 +10613,7 @@
       </p:sp>
       <p:sp>
         <p:nvSpPr>
-          <p:cNvPr id="31" name="Shape 29"/>
+          <p:cNvPr id="22" name="Shape 20"/>
           <p:cNvSpPr/>
           <p:nvPr/>
         </p:nvSpPr>
@@ -11153,7 +10640,7 @@
       </p:sp>
       <p:sp>
         <p:nvSpPr>
-          <p:cNvPr id="32" name="Shape 30"/>
+          <p:cNvPr id="23" name="Shape 21"/>
           <p:cNvSpPr/>
           <p:nvPr/>
         </p:nvSpPr>
@@ -11178,7 +10665,7 @@
       </p:sp>
       <p:sp>
         <p:nvSpPr>
-          <p:cNvPr id="33" name="Text 31"/>
+          <p:cNvPr id="24" name="Text 22"/>
           <p:cNvSpPr txBox="1"/>
           <p:nvPr/>
         </p:nvSpPr>
@@ -11217,7 +10704,7 @@
       </p:sp>
       <p:sp>
         <p:nvSpPr>
-          <p:cNvPr id="34" name="Text 32"/>
+          <p:cNvPr id="25" name="Text 23"/>
           <p:cNvSpPr txBox="1"/>
           <p:nvPr/>
         </p:nvSpPr>
@@ -11256,7 +10743,7 @@
       </p:sp>
       <p:sp>
         <p:nvSpPr>
-          <p:cNvPr id="35" name="Text 33"/>
+          <p:cNvPr id="26" name="Text 24"/>
           <p:cNvSpPr txBox="1"/>
           <p:nvPr/>
         </p:nvSpPr>
@@ -12161,7 +11648,7 @@
                 <a:ea typeface="Yu Gothic" pitchFamily="34" charset="-122"/>
                 <a:cs typeface="Yu Gothic" pitchFamily="34" charset="-120"/>
               </a:rPr>
-              <a:t>まずは無料で、1か月。</a:t>
+              <a:t>0円から、はじめられます。</a:t>
             </a:r>
             <a:endParaRPr lang="en-US" sz="3800" dirty="0"/>
           </a:p>
@@ -12505,7 +11992,7 @@
                 <a:ea typeface="Yu Gothic" pitchFamily="34" charset="-122"/>
                 <a:cs typeface="Yu Gothic" pitchFamily="34" charset="-120"/>
               </a:rPr>
-              <a:t>1か月無料。カードを登録しなければ請求されません。</a:t>
+              <a:t>プランによって1か月無料。カードを登録しなければ請求されません。</a:t>
             </a:r>
             <a:endParaRPr lang="en-US" sz="1400" dirty="0"/>
           </a:p>
